--- a/materials/lectures/12-bfs-pt_II/slides.pptx
+++ b/materials/lectures/12-bfs-pt_II/slides.pptx
@@ -50,35 +50,23 @@
       <p:boldItalic r:id="rId36"/>
     </p:embeddedFont>
     <p:embeddedFont>
-      <p:font typeface="Calibri" panose="020F0502020204030204" pitchFamily="34" charset="0"/>
+      <p:font typeface="Cambria Math" panose="02040503050406030204" pitchFamily="18" charset="0"/>
       <p:regular r:id="rId37"/>
-      <p:bold r:id="rId38"/>
-      <p:italic r:id="rId39"/>
-      <p:boldItalic r:id="rId40"/>
-    </p:embeddedFont>
-    <p:embeddedFont>
-      <p:font typeface="Calibri Light" panose="020F0302020204030204" pitchFamily="34" charset="0"/>
-      <p:regular r:id="rId41"/>
-      <p:italic r:id="rId42"/>
-    </p:embeddedFont>
-    <p:embeddedFont>
-      <p:font typeface="Cambria Math" panose="02040503050406030204" pitchFamily="18" charset="0"/>
-      <p:regular r:id="rId43"/>
     </p:embeddedFont>
     <p:embeddedFont>
       <p:font typeface="Gill Sans MT" panose="020B0502020104020203" pitchFamily="34" charset="0"/>
-      <p:regular r:id="rId44"/>
-      <p:bold r:id="rId45"/>
-      <p:italic r:id="rId46"/>
-      <p:boldItalic r:id="rId47"/>
+      <p:regular r:id="rId38"/>
+      <p:bold r:id="rId39"/>
+      <p:italic r:id="rId40"/>
+      <p:boldItalic r:id="rId41"/>
     </p:embeddedFont>
     <p:embeddedFont>
       <p:font typeface="Wingdings 3" panose="05040102010807070707" pitchFamily="18" charset="2"/>
-      <p:regular r:id="rId48"/>
+      <p:regular r:id="rId42"/>
     </p:embeddedFont>
   </p:embeddedFontLst>
   <p:custDataLst>
-    <p:tags r:id="rId49"/>
+    <p:tags r:id="rId43"/>
   </p:custDataLst>
   <p:defaultTextStyle>
     <a:defPPr>
@@ -331,7 +319,7 @@
               <a:pPr>
                 <a:defRPr/>
               </a:pPr>
-              <a:t>2/12/2023</a:t>
+              <a:t>2/14/2025</a:t>
             </a:fld>
             <a:endParaRPr lang="en-US"/>
           </a:p>
@@ -1019,7 +1007,7 @@
               <a:pPr>
                 <a:defRPr/>
               </a:pPr>
-              <a:t>2/12/2023</a:t>
+              <a:t>2/14/2025</a:t>
             </a:fld>
             <a:endParaRPr lang="en-US"/>
           </a:p>
@@ -1263,7 +1251,7 @@
           <a:p>
             <a:fld id="{344494C4-6097-4BA9-B81C-8FE8D10E85BA}" type="datetimeFigureOut">
               <a:rPr lang="en-US" smtClean="0"/>
-              <a:t>2/12/2023</a:t>
+              <a:t>2/14/2025</a:t>
             </a:fld>
             <a:endParaRPr lang="en-US"/>
           </a:p>
@@ -1508,7 +1496,7 @@
           <a:p>
             <a:fld id="{344494C4-6097-4BA9-B81C-8FE8D10E85BA}" type="datetimeFigureOut">
               <a:rPr lang="en-US" smtClean="0"/>
-              <a:t>2/12/2023</a:t>
+              <a:t>2/14/2025</a:t>
             </a:fld>
             <a:endParaRPr lang="en-US"/>
           </a:p>
@@ -1888,7 +1876,7 @@
           <a:p>
             <a:fld id="{344494C4-6097-4BA9-B81C-8FE8D10E85BA}" type="datetimeFigureOut">
               <a:rPr lang="en-US" smtClean="0"/>
-              <a:t>2/12/2023</a:t>
+              <a:t>2/14/2025</a:t>
             </a:fld>
             <a:endParaRPr lang="en-US"/>
           </a:p>
@@ -2021,7 +2009,7 @@
           <a:p>
             <a:fld id="{344494C4-6097-4BA9-B81C-8FE8D10E85BA}" type="datetimeFigureOut">
               <a:rPr lang="en-US" smtClean="0"/>
-              <a:t>2/12/2023</a:t>
+              <a:t>2/14/2025</a:t>
             </a:fld>
             <a:endParaRPr lang="en-US"/>
           </a:p>
@@ -2132,7 +2120,7 @@
           <a:p>
             <a:fld id="{344494C4-6097-4BA9-B81C-8FE8D10E85BA}" type="datetimeFigureOut">
               <a:rPr lang="en-US" smtClean="0"/>
-              <a:t>2/12/2023</a:t>
+              <a:t>2/14/2025</a:t>
             </a:fld>
             <a:endParaRPr lang="en-US"/>
           </a:p>
@@ -2423,7 +2411,7 @@
           <a:p>
             <a:fld id="{344494C4-6097-4BA9-B81C-8FE8D10E85BA}" type="datetimeFigureOut">
               <a:rPr lang="en-US" smtClean="0"/>
-              <a:t>2/12/2023</a:t>
+              <a:t>2/14/2025</a:t>
             </a:fld>
             <a:endParaRPr lang="en-US"/>
           </a:p>
@@ -2691,7 +2679,7 @@
           <a:p>
             <a:fld id="{344494C4-6097-4BA9-B81C-8FE8D10E85BA}" type="datetimeFigureOut">
               <a:rPr lang="en-US" smtClean="0"/>
-              <a:t>2/12/2023</a:t>
+              <a:t>2/14/2025</a:t>
             </a:fld>
             <a:endParaRPr lang="en-US"/>
           </a:p>
@@ -2875,7 +2863,7 @@
           <a:p>
             <a:fld id="{344494C4-6097-4BA9-B81C-8FE8D10E85BA}" type="datetimeFigureOut">
               <a:rPr lang="en-US" smtClean="0"/>
-              <a:t>2/12/2023</a:t>
+              <a:t>2/14/2025</a:t>
             </a:fld>
             <a:endParaRPr lang="en-US"/>
           </a:p>
@@ -3069,7 +3057,7 @@
           <a:p>
             <a:fld id="{344494C4-6097-4BA9-B81C-8FE8D10E85BA}" type="datetimeFigureOut">
               <a:rPr lang="en-US" smtClean="0"/>
-              <a:t>2/12/2023</a:t>
+              <a:t>2/14/2025</a:t>
             </a:fld>
             <a:endParaRPr lang="en-US"/>
           </a:p>
@@ -3267,7 +3255,7 @@
           <a:p>
             <a:fld id="{7BF7D500-1223-4445-9EB2-2C72C770F9EB}" type="datetimeFigureOut">
               <a:rPr lang="en-US" smtClean="0"/>
-              <a:t>2/12/2023</a:t>
+              <a:t>2/14/2025</a:t>
             </a:fld>
             <a:endParaRPr lang="en-US"/>
           </a:p>
@@ -3450,7 +3438,7 @@
               <a:pPr>
                 <a:defRPr/>
               </a:pPr>
-              <a:t>2/12/2023</a:t>
+              <a:t>2/14/2025</a:t>
             </a:fld>
             <a:endParaRPr lang="en-US"/>
           </a:p>
@@ -3604,7 +3592,7 @@
           <a:p>
             <a:fld id="{7BF7D500-1223-4445-9EB2-2C72C770F9EB}" type="datetimeFigureOut">
               <a:rPr lang="en-US" smtClean="0"/>
-              <a:t>2/12/2023</a:t>
+              <a:t>2/14/2025</a:t>
             </a:fld>
             <a:endParaRPr lang="en-US"/>
           </a:p>
@@ -3849,7 +3837,7 @@
           <a:p>
             <a:fld id="{7BF7D500-1223-4445-9EB2-2C72C770F9EB}" type="datetimeFigureOut">
               <a:rPr lang="en-US" smtClean="0"/>
-              <a:t>2/12/2023</a:t>
+              <a:t>2/14/2025</a:t>
             </a:fld>
             <a:endParaRPr lang="en-US"/>
           </a:p>
@@ -4078,7 +4066,7 @@
           <a:p>
             <a:fld id="{7BF7D500-1223-4445-9EB2-2C72C770F9EB}" type="datetimeFigureOut">
               <a:rPr lang="en-US" smtClean="0"/>
-              <a:t>2/12/2023</a:t>
+              <a:t>2/14/2025</a:t>
             </a:fld>
             <a:endParaRPr lang="en-US"/>
           </a:p>
@@ -4442,7 +4430,7 @@
           <a:p>
             <a:fld id="{7BF7D500-1223-4445-9EB2-2C72C770F9EB}" type="datetimeFigureOut">
               <a:rPr lang="en-US" smtClean="0"/>
-              <a:t>2/12/2023</a:t>
+              <a:t>2/14/2025</a:t>
             </a:fld>
             <a:endParaRPr lang="en-US"/>
           </a:p>
@@ -4559,7 +4547,7 @@
           <a:p>
             <a:fld id="{7BF7D500-1223-4445-9EB2-2C72C770F9EB}" type="datetimeFigureOut">
               <a:rPr lang="en-US" smtClean="0"/>
-              <a:t>2/12/2023</a:t>
+              <a:t>2/14/2025</a:t>
             </a:fld>
             <a:endParaRPr lang="en-US"/>
           </a:p>
@@ -4654,7 +4642,7 @@
           <a:p>
             <a:fld id="{7BF7D500-1223-4445-9EB2-2C72C770F9EB}" type="datetimeFigureOut">
               <a:rPr lang="en-US" smtClean="0"/>
-              <a:t>2/12/2023</a:t>
+              <a:t>2/14/2025</a:t>
             </a:fld>
             <a:endParaRPr lang="en-US"/>
           </a:p>
@@ -4929,7 +4917,7 @@
           <a:p>
             <a:fld id="{7BF7D500-1223-4445-9EB2-2C72C770F9EB}" type="datetimeFigureOut">
               <a:rPr lang="en-US" smtClean="0"/>
-              <a:t>2/12/2023</a:t>
+              <a:t>2/14/2025</a:t>
             </a:fld>
             <a:endParaRPr lang="en-US"/>
           </a:p>
@@ -5181,7 +5169,7 @@
           <a:p>
             <a:fld id="{7BF7D500-1223-4445-9EB2-2C72C770F9EB}" type="datetimeFigureOut">
               <a:rPr lang="en-US" smtClean="0"/>
-              <a:t>2/12/2023</a:t>
+              <a:t>2/14/2025</a:t>
             </a:fld>
             <a:endParaRPr lang="en-US"/>
           </a:p>
@@ -5349,7 +5337,7 @@
           <a:p>
             <a:fld id="{7BF7D500-1223-4445-9EB2-2C72C770F9EB}" type="datetimeFigureOut">
               <a:rPr lang="en-US" smtClean="0"/>
-              <a:t>2/12/2023</a:t>
+              <a:t>2/14/2025</a:t>
             </a:fld>
             <a:endParaRPr lang="en-US"/>
           </a:p>
@@ -5527,7 +5515,7 @@
           <a:p>
             <a:fld id="{7BF7D500-1223-4445-9EB2-2C72C770F9EB}" type="datetimeFigureOut">
               <a:rPr lang="en-US" smtClean="0"/>
-              <a:t>2/12/2023</a:t>
+              <a:t>2/14/2025</a:t>
             </a:fld>
             <a:endParaRPr lang="en-US"/>
           </a:p>
@@ -5771,7 +5759,7 @@
               <a:pPr>
                 <a:defRPr/>
               </a:pPr>
-              <a:t>2/12/2023</a:t>
+              <a:t>2/14/2025</a:t>
             </a:fld>
             <a:endParaRPr lang="en-US"/>
           </a:p>
@@ -6121,7 +6109,7 @@
               <a:pPr>
                 <a:defRPr/>
               </a:pPr>
-              <a:t>2/12/2023</a:t>
+              <a:t>2/14/2025</a:t>
             </a:fld>
             <a:endParaRPr lang="en-US"/>
           </a:p>
@@ -6285,7 +6273,7 @@
               <a:pPr>
                 <a:defRPr/>
               </a:pPr>
-              <a:t>2/12/2023</a:t>
+              <a:t>2/14/2025</a:t>
             </a:fld>
             <a:endParaRPr lang="en-US"/>
           </a:p>
@@ -6376,7 +6364,7 @@
               <a:pPr>
                 <a:defRPr/>
               </a:pPr>
-              <a:t>2/12/2023</a:t>
+              <a:t>2/14/2025</a:t>
             </a:fld>
             <a:endParaRPr lang="en-US"/>
           </a:p>
@@ -6485,7 +6473,7 @@
               <a:pPr>
                 <a:defRPr/>
               </a:pPr>
-              <a:t>2/12/2023</a:t>
+              <a:t>2/14/2025</a:t>
             </a:fld>
             <a:endParaRPr lang="en-US"/>
           </a:p>
@@ -6670,7 +6658,7 @@
           <a:p>
             <a:fld id="{344494C4-6097-4BA9-B81C-8FE8D10E85BA}" type="datetimeFigureOut">
               <a:rPr lang="en-US" smtClean="0"/>
-              <a:t>2/12/2023</a:t>
+              <a:t>2/14/2025</a:t>
             </a:fld>
             <a:endParaRPr lang="en-US"/>
           </a:p>
@@ -6854,7 +6842,7 @@
           <a:p>
             <a:fld id="{344494C4-6097-4BA9-B81C-8FE8D10E85BA}" type="datetimeFigureOut">
               <a:rPr lang="en-US" smtClean="0"/>
-              <a:t>2/12/2023</a:t>
+              <a:t>2/14/2025</a:t>
             </a:fld>
             <a:endParaRPr lang="en-US"/>
           </a:p>
@@ -7103,7 +7091,7 @@
               <a:pPr>
                 <a:defRPr/>
               </a:pPr>
-              <a:t>2/12/2023</a:t>
+              <a:t>2/14/2025</a:t>
             </a:fld>
             <a:endParaRPr lang="en-US"/>
           </a:p>
@@ -8357,7 +8345,7 @@
           <a:p>
             <a:fld id="{7BF7D500-1223-4445-9EB2-2C72C770F9EB}" type="datetimeFigureOut">
               <a:rPr lang="en-US" smtClean="0"/>
-              <a:t>2/12/2023</a:t>
+              <a:t>2/14/2025</a:t>
             </a:fld>
             <a:endParaRPr lang="en-US"/>
           </a:p>
@@ -8896,7 +8884,15 @@
             </a:r>
             <a:r>
               <a:rPr lang="en-US" sz="2800" i="1" dirty="0"/>
-              <a:t>BFS Part II : shortest path in (unweighted) graphs</a:t>
+              <a:t>BFS Part II : shortest path in (</a:t>
+            </a:r>
+            <a:r>
+              <a:rPr lang="en-US" sz="2800" b="1" i="1" dirty="0"/>
+              <a:t>unweighted</a:t>
+            </a:r>
+            <a:r>
+              <a:rPr lang="en-US" sz="2800" i="1" dirty="0"/>
+              <a:t>) graphs</a:t>
             </a:r>
           </a:p>
           <a:p>
@@ -9927,8 +9923,8 @@
           </a:p>
         </p:txBody>
       </p:sp>
-      <mc:AlternateContent xmlns:mc="http://schemas.openxmlformats.org/markup-compatibility/2006">
-        <mc:Choice xmlns:a14="http://schemas.microsoft.com/office/drawing/2010/main" Requires="a14">
+      <mc:AlternateContent xmlns:mc="http://schemas.openxmlformats.org/markup-compatibility/2006" xmlns:a14="http://schemas.microsoft.com/office/drawing/2010/main">
+        <mc:Choice Requires="a14">
           <p:sp>
             <p:nvSpPr>
               <p:cNvPr id="3" name="Content Placeholder 2">
@@ -10040,7 +10036,7 @@
             </p:txBody>
           </p:sp>
         </mc:Choice>
-        <mc:Fallback>
+        <mc:Fallback xmlns="">
           <p:sp>
             <p:nvSpPr>
               <p:cNvPr id="3" name="Content Placeholder 2">
